--- a/slides/decks/s15-pulmonary.pptx
+++ b/slides/decks/s15-pulmonary.pptx
@@ -32,10 +32,9 @@
     <p:sldId id="280" r:id="rId26"/>
     <p:sldId id="281" r:id="rId27"/>
     <p:sldId id="282" r:id="rId28"/>
-    <p:sldId id="283" r:id="rId29"/>
   </p:sldIdLst>
   <p:notesMasterIdLst>
-    <p:notesMasterId r:id="rId30"/>
+    <p:notesMasterId r:id="rId29"/>
   </p:notesMasterIdLst>
   <p:sldSz cx="12192000" cy="6858000"/>
   <p:notesSz cx="6858000" cy="12192000"/>
@@ -134,19 +133,19 @@
   <p:extLst>
     <p:ext uri="{521415D9-36F7-43E2-AB2F-B90AF26B5E84}">
       <p14:sectionLst xmlns:p14="http://schemas.microsoft.com/office/powerpoint/2010/main">
-        <p14:section name="Opening" id="{d332fe6f-a04f-1a85-73bd-84d8008e0358}">
+        <p14:section name="Opening" id="{3c5c049b-0be3-5453-e47c-109426cb2d88}">
           <p14:sldIdLst>
             <p14:sldId id="256"/>
             <p14:sldId id="257"/>
           </p14:sldIdLst>
         </p14:section>
-        <p14:section name="Classification and work-up" id="{0c02e58f-6c5e-2f30-4203-a3aefcd8b031}">
+        <p14:section name="Classification and work-up" id="{d8cc70e2-3973-3b10-2b05-9875e17b552f}">
           <p14:sldIdLst>
             <p14:sldId id="258"/>
             <p14:sldId id="259"/>
           </p14:sldIdLst>
         </p14:section>
-        <p14:section name="Early complications" id="{51e5fda1-df30-4ad2-adec-fef0d8997866}">
+        <p14:section name="Early complications" id="{f4a9174d-976c-4200-d422-cbe9cb0031fd}">
           <p14:sldIdLst>
             <p14:sldId id="260"/>
             <p14:sldId id="261"/>
@@ -157,7 +156,7 @@
             <p14:sldId id="266"/>
           </p14:sldIdLst>
         </p14:section>
-        <p14:section name="Late complications" id="{77f6e464-8874-c82a-51f5-68b852f6a7d5}">
+        <p14:section name="Late complications" id="{98be0755-709b-5171-4f34-d817e1fe1e0a}">
           <p14:sldIdLst>
             <p14:sldId id="267"/>
             <p14:sldId id="268"/>
@@ -166,7 +165,7 @@
             <p14:sldId id="271"/>
           </p14:sldIdLst>
         </p14:section>
-        <p14:section name="Board questions" id="{422d2d8a-15e4-415b-97c7-26ec92ed22d4}">
+        <p14:section name="Board questions" id="{04add629-6796-cd06-7294-5d898557a390}">
           <p14:sldIdLst>
             <p14:sldId id="272"/>
             <p14:sldId id="273"/>
@@ -176,18 +175,17 @@
             <p14:sldId id="277"/>
           </p14:sldIdLst>
         </p14:section>
-        <p14:section name="References" id="{0be6437b-75ae-2cb6-febe-0fcd6a3a8222}">
+        <p14:section name="References" id="{8ef991c9-1fbb-9a6c-b4da-838ffd2ccc2c}">
           <p14:sldIdLst>
             <p14:sldId id="278"/>
             <p14:sldId id="279"/>
-            <p14:sldId id="280"/>
           </p14:sldIdLst>
         </p14:section>
-        <p14:section name="Backup" id="{f0cf21d8-710e-b67a-df97-5da2ea6b1a57}">
+        <p14:section name="Backup" id="{11872858-05ef-3962-fb89-ec6288783fd3}">
           <p14:sldIdLst>
+            <p14:sldId id="280"/>
             <p14:sldId id="281"/>
             <p14:sldId id="282"/>
-            <p14:sldId id="283"/>
           </p14:sldIdLst>
         </p14:section>
       </p14:sectionLst>
@@ -621,7 +619,7 @@
             </a:pPr>
             <a:r>
               <a:rPr lang="en-US" dirty="0"/>
-              <a:t>前半段談早期的 fluid overload、IPS 和 DAH，後半段談晚期的 BOS 和 ILD，最後做三題 board-style 題目。今天的範圍只有一章，所以會比較深入，把書上的表格、診斷條件和試驗數字盡量講完整。</a:t>
+              <a:t>前半段談早期的 fluid overload、IPS 和 DAH，後半段談晚期的 BOS 和 ILD，最後做三題 board-style 題目。今天只有一章，會講得比較深入。</a:t>
             </a:r>
           </a:p>
         </p:txBody>
@@ -1661,6 +1659,17 @@
             </a:pPr>
             <a:r>
               <a:rPr lang="en-US" dirty="0"/>
+              <a:t>兩者的肺外 cGVHD 比例都很高，所以書上也提出疑問，ILD 是否其實是肺部 cGVHD 的另一種表現，目前還沒有定論。PPFE 是例外，肺外 cGVHD 不到一半，對免疫抑制也沒有反應。</a:t>
+            </a:r>
+          </a:p>
+          <a:p>
+            <a:pPr>
+              <a:spcAft>
+                <a:spcPts val="600"/>
+              </a:spcAft>
+            </a:pPr>
+            <a:r>
+              <a:rPr lang="en-US" dirty="0"/>
               <a:t>治療上 BOS 的選擇有限，ILD 通常對 steroid 有反應，PPFE 除外。長期存活其實相近，五年都在七成上下，但呼吸功能障礙和反覆感染很常見。考題給 PFT 數字和 CT 描述，用這張表就能判斷。</a:t>
             </a:r>
           </a:p>
@@ -1829,6 +1838,17 @@
               </a:spcAft>
             </a:pPr>
             <a:r>
+              <a:rPr lang="en-US" dirty="0"/>
+              <a:t>請先確認 IPS 三項條件是否成立，再選治療。</a:t>
+            </a:r>
+          </a:p>
+          <a:p>
+            <a:pPr>
+              <a:spcAft>
+                <a:spcPts val="600"/>
+              </a:spcAft>
+            </a:pPr>
+            <a:r>
               <a:rPr lang="en-US" b="1" dirty="0"/>
               <a:t>[Pause for answers.]</a:t>
             </a:r>
@@ -2476,6 +2496,17 @@
               </a:spcAft>
             </a:pPr>
             <a:r>
+              <a:rPr lang="en-US" dirty="0"/>
+              <a:t>題幹的 PFT 數字要一個一個對照。</a:t>
+            </a:r>
+          </a:p>
+          <a:p>
+            <a:pPr>
+              <a:spcAft>
+                <a:spcPts val="600"/>
+              </a:spcAft>
+            </a:pPr>
+            <a:r>
               <a:rPr lang="en-US" b="1" dirty="0"/>
               <a:t>[Pause for answers.]</a:t>
             </a:r>
@@ -2863,11 +2894,37 @@
           <a:bodyPr/>
           <a:lstStyle/>
           <a:p>
+            <a:pPr>
+              <a:spcAft>
+                <a:spcPts val="600"/>
+              </a:spcAft>
+            </a:pPr>
             <a:r>
               <a:rPr lang="en-US" dirty="0"/>
-              <a:t>各頁頁尾短式引用的完整文獻，不講。</a:t>
-            </a:r>
-            <a:endParaRPr lang="en-US" dirty="0"/>
+              <a:t>這是第 44 章的內容，第 9 堂已經講過。只要肺有輕度侵犯，整體至少是 moderate；肺是中度或重度，整體就是 severe。肺部侵犯也是 cGVHD 長期死亡的危險因子之一，abatacept 和 imatinib 在肺部 cGVHD 有一些資料。</a:t>
+            </a:r>
+          </a:p>
+          <a:p>
+            <a:pPr>
+              <a:spcAft>
+                <a:spcPts val="600"/>
+              </a:spcAft>
+            </a:pPr>
+            <a:r>
+              <a:rPr lang="en-US" b="1" dirty="0"/>
+              <a:t>講者提醒（不念出來）：</a:t>
+            </a:r>
+          </a:p>
+          <a:p>
+            <a:pPr>
+              <a:spcAft>
+                <a:spcPts val="600"/>
+              </a:spcAft>
+            </a:pPr>
+            <a:r>
+              <a:rPr lang="en-US" dirty="0"/>
+              <a:t>- Ch. 44 prints the number of involved organs as '&gt;3' for both moderate and severe; the organ-count row is left off this slide. Check Session 09 for the agreed wording.</a:t>
+            </a:r>
           </a:p>
         </p:txBody>
       </p:sp>
@@ -2951,37 +3008,11 @@
           <a:bodyPr/>
           <a:lstStyle/>
           <a:p>
-            <a:pPr>
-              <a:spcAft>
-                <a:spcPts val="600"/>
-              </a:spcAft>
-            </a:pPr>
             <a:r>
               <a:rPr lang="en-US" dirty="0"/>
-              <a:t>這是第 44 章的內容，第 9 堂已經講過。只要肺有輕度侵犯，整體至少是 moderate；肺是中度或重度，整體就是 severe。肺部侵犯也是 cGVHD 長期死亡的危險因子之一，abatacept 和 imatinib 在肺部 cGVHD 有一些資料。</a:t>
-            </a:r>
-          </a:p>
-          <a:p>
-            <a:pPr>
-              <a:spcAft>
-                <a:spcPts val="600"/>
-              </a:spcAft>
-            </a:pPr>
-            <a:r>
-              <a:rPr lang="en-US" b="1" dirty="0"/>
-              <a:t>講者提醒（不念出來）：</a:t>
-            </a:r>
-          </a:p>
-          <a:p>
-            <a:pPr>
-              <a:spcAft>
-                <a:spcPts val="600"/>
-              </a:spcAft>
-            </a:pPr>
-            <a:r>
-              <a:rPr lang="en-US" dirty="0"/>
-              <a:t>- Ch. 44 prints the number of involved organs as '&gt;3' for both moderate and severe; the organ-count row is left off this slide. Check Session 09 for the agreed wording.</a:t>
-            </a:r>
+              <a:t>IPS 病人的 sTNFR1、IL-6、ST2 等會上升，其中 sTNFR1、IL-6 和 ST2 在症狀出現前就有預測力。Rowan 2022 的 panel 在 day 7 就能預測呼吸衰竭和死亡，但目前都還不是常規檢查。</a:t>
+            </a:r>
+            <a:endParaRPr lang="en-US" dirty="0"/>
           </a:p>
         </p:txBody>
       </p:sp>
@@ -3067,7 +3098,7 @@
           <a:p>
             <a:r>
               <a:rPr lang="en-US" dirty="0"/>
-              <a:t>IPS 病人的 sTNFR1、IL-6、ST2 等會上升，其中 sTNFR1、IL-6 和 ST2 在症狀出現前就有預測力。Rowan 2022 的 panel 在 day 7 就能預測呼吸衰竭和死亡，但目前都還不是常規檢查。</a:t>
+              <a:t>目前的 BOS 標準大概只能抓到晚期病人，而且有些 FEV1/VC 正常的 BOS 不在 NIH 標準內。第 44 章另外提醒，兒童的呼吸肌無力、胸壁硬化和 TBI 後胸廓生長不良，會讓 PFT 呈現混合型。</a:t>
             </a:r>
             <a:endParaRPr lang="en-US" dirty="0"/>
           </a:p>
@@ -3091,94 +3122,6 @@
             <a:fld id="{F7021451-1387-4CA6-816F-3879F97B5CBC}" type="slidenum">
               <a:rPr lang="en-US"/>
               <a:t>27</a:t>
-            </a:fld>
-            <a:endParaRPr lang="en-US"/>
-          </a:p>
-        </p:txBody>
-      </p:sp>
-    </p:spTree>
-    <p:extLst>
-      <p:ext uri="{BB962C8B-B14F-4D97-AF65-F5344CB8AC3E}">
-        <p14:creationId xmlns:p14="http://schemas.microsoft.com/office/powerpoint/2010/main" val="1024086991"/>
-      </p:ext>
-    </p:extLst>
-  </p:cSld>
-  <p:clrMapOvr>
-    <a:masterClrMapping/>
-  </p:clrMapOvr>
-</p:notes>
-</file>
-
-<file path=ppt/notesSlides/notesSlide28.xml><?xml version="1.0" encoding="utf-8"?>
-<p:notes xmlns:a="http://schemas.openxmlformats.org/drawingml/2006/main" xmlns:r="http://schemas.openxmlformats.org/officeDocument/2006/relationships" xmlns:p="http://schemas.openxmlformats.org/presentationml/2006/main">
-  <p:cSld>
-    <p:spTree>
-      <p:nvGrpSpPr>
-        <p:cNvPr id="1" name=""/>
-        <p:cNvGrpSpPr/>
-        <p:nvPr/>
-      </p:nvGrpSpPr>
-      <p:grpSpPr>
-        <a:xfrm>
-          <a:off x="0" y="0"/>
-          <a:ext cx="0" cy="0"/>
-          <a:chOff x="0" y="0"/>
-          <a:chExt cx="0" cy="0"/>
-        </a:xfrm>
-      </p:grpSpPr>
-      <p:sp>
-        <p:nvSpPr>
-          <p:cNvPr id="2" name="Slide Image Placeholder 1"/>
-          <p:cNvSpPr>
-            <a:spLocks noGrp="1" noRot="1" noChangeAspect="1"/>
-          </p:cNvSpPr>
-          <p:nvPr>
-            <p:ph type="sldImg"/>
-          </p:nvPr>
-        </p:nvSpPr>
-        <p:spPr/>
-      </p:sp>
-      <p:sp>
-        <p:nvSpPr>
-          <p:cNvPr id="3" name="Notes Placeholder 2"/>
-          <p:cNvSpPr>
-            <a:spLocks noGrp="1"/>
-          </p:cNvSpPr>
-          <p:nvPr>
-            <p:ph type="body" idx="1"/>
-          </p:nvPr>
-        </p:nvSpPr>
-        <p:spPr/>
-        <p:txBody>
-          <a:bodyPr/>
-          <a:lstStyle/>
-          <a:p>
-            <a:r>
-              <a:rPr lang="en-US" dirty="0"/>
-              <a:t>目前的 BOS 標準大概只能抓到晚期病人，而且有些 FEV1/VC 正常的 BOS 不在 NIH 標準內。第 44 章另外提醒，兒童的呼吸肌無力、胸壁硬化和 TBI 後胸廓生長不良，會讓 PFT 呈現混合型。</a:t>
-            </a:r>
-            <a:endParaRPr lang="en-US" dirty="0"/>
-          </a:p>
-        </p:txBody>
-      </p:sp>
-      <p:sp>
-        <p:nvSpPr>
-          <p:cNvPr id="4" name="Slide Number Placeholder 3"/>
-          <p:cNvSpPr>
-            <a:spLocks noGrp="1"/>
-          </p:cNvSpPr>
-          <p:nvPr>
-            <p:ph type="sldNum" sz="quarter" idx="10"/>
-          </p:nvPr>
-        </p:nvSpPr>
-        <p:spPr/>
-        <p:txBody>
-          <a:bodyPr/>
-          <a:lstStyle/>
-          <a:p>
-            <a:fld id="{F7021451-1387-4CA6-816F-3879F97B5CBC}" type="slidenum">
-              <a:rPr lang="en-US"/>
-              <a:t>28</a:t>
             </a:fld>
             <a:endParaRPr lang="en-US"/>
           </a:p>
@@ -3270,7 +3213,7 @@
             </a:pPr>
             <a:r>
               <a:rPr lang="en-US" dirty="0"/>
-              <a:t>這張表是 American Thoracic Society 的分類，依照主要受傷的組織分三大類。肺實質包括 acute interstitial pneumonitis、ARDS、BCNU 和放射線肺炎等。血管內皮這一類包括 PERDS、capillary leak、DAH、pulmonary VOD 和 TRALI。呼吸道上皮則是 ILD 和 BOS。</a:t>
+              <a:t>這張表是 American Thoracic Society 的分類，依照主要受傷的組織分三大類。肺實質包括 ARDS、BCNU 和放射線肺炎等。血管內皮這一類包括 PERDS、capillary leak、DAH、pulmonary VOD 和 TRALI。呼吸道上皮則是 ILD 和 BOS。</a:t>
             </a:r>
           </a:p>
           <a:p>
@@ -3461,7 +3404,7 @@
             </a:pPr>
             <a:r>
               <a:rPr lang="en-US" dirty="0"/>
-              <a:t>臨床上最常見的失誤是一路換抗生素，拖過一週才找胸腔科做支氣管鏡，這時陽性率已經下降。如果病人狀況不允許做 BAL，書上建議改用誘導痰液送同樣的檢查。</a:t>
+              <a:t>臨床上最常見的失誤是一路換抗生素，拖過一週才找胸腔科做支氣管鏡，這時陽性率已經下降。病人無法做 BAL 時，改送誘導痰液。</a:t>
             </a:r>
           </a:p>
         </p:txBody>
@@ -4061,6 +4004,17 @@
             <a:r>
               <a:rPr lang="en-US" dirty="0"/>
               <a:t>Etanercept 是 soluble TNF receptor，作用是中和 TNF-α，所以理論上和 IPS 的 TNF/LPS 路徑對得上。開始 etanercept 時，經驗性抗生素要繼續給，因為 BAL 陰性不代表完全沒有感染，而且兩者可以同時存在。</a:t>
+            </a:r>
+          </a:p>
+          <a:p>
+            <a:pPr>
+              <a:spcAft>
+                <a:spcPts val="600"/>
+              </a:spcAft>
+            </a:pPr>
+            <a:r>
+              <a:rPr lang="en-US" dirty="0"/>
+              <a:t>Etanercept 最多 8 劑，一週兩次，所以完整療程大約四週。</a:t>
             </a:r>
           </a:p>
           <a:p>
@@ -15580,7 +15534,7 @@
                   <a:schemeClr val="tx1"/>
                 </a:solidFill>
               </a:rPr>
-              <a:t>References, part 1 of 3</a:t>
+              <a:t>References, part 1 of 2</a:t>
             </a:r>
             <a:endParaRPr lang="en-US" sz="3600" dirty="0"/>
           </a:p>
@@ -15657,6 +15611,40 @@
             </a:r>
             <a:endParaRPr lang="en-US" sz="1100" dirty="0"/>
           </a:p>
+          <a:p>
+            <a:pPr indent="0" marL="0">
+              <a:spcAft>
+                <a:spcPts val="700"/>
+              </a:spcAft>
+              <a:buNone/>
+            </a:pPr>
+            <a:r>
+              <a:rPr lang="en-US" sz="1100" dirty="0">
+                <a:solidFill>
+                  <a:schemeClr val="tx1"/>
+                </a:solidFill>
+              </a:rPr>
+              <a:t>4. Yanik GA, Grupp SA, Pulsipher MA, et al. TNF-receptor inhibitor therapy for the treatment of children with idiopathic pneumonia syndrome. A joint pediatric consortium and Children’s Oncology Group study (ASCT0521). Biol Blood Marrow Transplant. 2015;21:67–73.</a:t>
+            </a:r>
+            <a:endParaRPr lang="en-US" sz="1100" dirty="0"/>
+          </a:p>
+          <a:p>
+            <a:pPr indent="0" marL="0">
+              <a:spcAft>
+                <a:spcPts val="700"/>
+              </a:spcAft>
+              <a:buNone/>
+            </a:pPr>
+            <a:r>
+              <a:rPr lang="en-US" sz="1100" dirty="0">
+                <a:solidFill>
+                  <a:schemeClr val="tx1"/>
+                </a:solidFill>
+              </a:rPr>
+              <a:t>5. Thompson J, Yin Z, D’Souza A, et al. Etanercept and corticosteroid therapy for the treatment of late-onset idiopathic pneumonia syndrome. Biol Blood Marrow Transplant. 2017;23:1955–60.</a:t>
+            </a:r>
+            <a:endParaRPr lang="en-US" sz="1100" dirty="0"/>
+          </a:p>
         </p:txBody>
       </p:sp>
       <p:sp>
@@ -15692,7 +15680,7 @@
                   <a:schemeClr val="tx1"/>
                 </a:solidFill>
               </a:rPr>
-              <a:t>4. Yanik GA, Grupp SA, Pulsipher MA, et al. TNF-receptor inhibitor therapy for the treatment of children with idiopathic pneumonia syndrome. A joint pediatric consortium and Children’s Oncology Group study (ASCT0521). Biol Blood Marrow Transplant. 2015;21:67–73.</a:t>
+              <a:t>6. Yanik GA, Horowitz MM, Weisdorf DJ, et al. Randomized, double-blind, placebo-controlled trial of soluble tumor necrosis factor receptor: Enbrel (etanercept) for the treatment of idiopathic pneumonia syndrome after allogeneic stem cell transplantation: blood and marrow. Biol Blood Marrow Transplant. 2014;20:858–64.</a:t>
             </a:r>
             <a:endParaRPr lang="en-US" sz="1100" dirty="0"/>
           </a:p>
@@ -15709,7 +15697,7 @@
                   <a:schemeClr val="tx1"/>
                 </a:solidFill>
               </a:rPr>
-              <a:t>5. Thompson J, Yin Z, D’Souza A, et al. Etanercept and corticosteroid therapy for the treatment of late-onset idiopathic pneumonia syndrome. Biol Blood Marrow Transplant. 2017;23:1955–60.</a:t>
+              <a:t>7. Varelias A, Gartlan KH, Kreijveld E, et al. Lung parenchyma-derived IL-6 promotes IL-17A-dependent acute lung injury after allogeneic stem cell transplantation. Blood. 2015;125:2435–44.</a:t>
             </a:r>
             <a:endParaRPr lang="en-US" sz="1100" dirty="0"/>
           </a:p>
@@ -15726,7 +15714,24 @@
                   <a:schemeClr val="tx1"/>
                 </a:solidFill>
               </a:rPr>
-              <a:t>6. Yanik GA, Horowitz MM, Weisdorf DJ, et al. Randomized, double-blind, placebo-controlled trial of soluble tumor necrosis factor receptor: Enbrel (etanercept) for the treatment of idiopathic pneumonia syndrome after allogeneic stem cell transplantation: blood and marrow. Biol Blood Marrow Transplant. 2014;20:858–64.</a:t>
+              <a:t>8. Wenger DS, Triplette M, Crothers K, et al. Incidence, risk factors, and outcomes of idiopathic pneumonia syndrome after allogeneic hematopoietic cell transplantation. Biol Blood Marrow Transplant. 2020;26:413–20.</a:t>
+            </a:r>
+            <a:endParaRPr lang="en-US" sz="1100" dirty="0"/>
+          </a:p>
+          <a:p>
+            <a:pPr indent="0" marL="0">
+              <a:spcAft>
+                <a:spcPts val="700"/>
+              </a:spcAft>
+              <a:buNone/>
+            </a:pPr>
+            <a:r>
+              <a:rPr lang="en-US" sz="1100" dirty="0">
+                <a:solidFill>
+                  <a:schemeClr val="tx1"/>
+                </a:solidFill>
+              </a:rPr>
+              <a:t>9. Rathi NK, Tanner AR, Dinh A, et al. Low-, medium- and high-dose steroids with or without aminocaproic acid in adult hematopoietic SCT patients with diffuse alveolar hemorrhage. Bone Marrow Transplant. 2015;50:420–6.</a:t>
             </a:r>
             <a:endParaRPr lang="en-US" sz="1100" dirty="0"/>
           </a:p>
@@ -15902,7 +15907,7 @@
                   <a:schemeClr val="tx1"/>
                 </a:solidFill>
               </a:rPr>
-              <a:t>References, part 2 of 3</a:t>
+              <a:t>References, part 2 of 2</a:t>
             </a:r>
             <a:endParaRPr lang="en-US" sz="3600" dirty="0"/>
           </a:p>
@@ -15941,7 +15946,7 @@
                   <a:schemeClr val="tx1"/>
                 </a:solidFill>
               </a:rPr>
-              <a:t>7. Varelias A, Gartlan KH, Kreijveld E, et al. Lung parenchyma-derived IL-6 promotes IL-17A-dependent acute lung injury after allogeneic stem cell transplantation. Blood. 2015;125:2435–44.</a:t>
+              <a:t>10. Jagasia MH, Greinix HT, Arora M, et al. National Institutes of Health consensus development project on criteria for clinical trials in chronic graft-versus-host disease: I. The 2014 diagnosis and staging working group report. Biol Blood Marrow Transplant. 2015;21:389–401.</a:t>
             </a:r>
             <a:endParaRPr lang="en-US" sz="1100" dirty="0"/>
           </a:p>
@@ -15958,7 +15963,7 @@
                   <a:schemeClr val="tx1"/>
                 </a:solidFill>
               </a:rPr>
-              <a:t>8. Wenger DS, Triplette M, Crothers K, et al. Incidence, risk factors, and outcomes of idiopathic pneumonia syndrome after allogeneic hematopoietic cell transplantation. Biol Blood Marrow Transplant. 2020;26:413–20.</a:t>
+              <a:t>11. Bergeron A, Chevret S, Chagnon K, et al. Budesonide/formoterol for bronchiolitis obliterans after hematopoietic stem cell transplantation. Am J Respir Crit Care Med. 2015;191:1242–9.</a:t>
             </a:r>
             <a:endParaRPr lang="en-US" sz="1100" dirty="0"/>
           </a:p>
@@ -15975,7 +15980,41 @@
                   <a:schemeClr val="tx1"/>
                 </a:solidFill>
               </a:rPr>
-              <a:t>9. Rathi NK, Tanner AR, Dinh A, et al. Low-, medium- and high-dose steroids with or without aminocaproic acid in adult hematopoietic SCT patients with diffuse alveolar hemorrhage. Bone Marrow Transplant. 2015;50:420–6.</a:t>
+              <a:t>12. Williams KM, Cheng GS, Pusic I, et al. Fluticasone, Azithromycin, and Montelukast treatment for new-onset bronchiolitis obliterans syndrome after hematopoietic cell transplantation. Biol Blood Marrow Transplant. 2016;22:710–6.</a:t>
+            </a:r>
+            <a:endParaRPr lang="en-US" sz="1100" dirty="0"/>
+          </a:p>
+          <a:p>
+            <a:pPr indent="0" marL="0">
+              <a:spcAft>
+                <a:spcPts val="700"/>
+              </a:spcAft>
+              <a:buNone/>
+            </a:pPr>
+            <a:r>
+              <a:rPr lang="en-US" sz="1100" dirty="0">
+                <a:solidFill>
+                  <a:schemeClr val="tx1"/>
+                </a:solidFill>
+              </a:rPr>
+              <a:t>13. Bergeron A, Chevret S, Granata A, et al. Effect of azithromycin on airflow decline-free survival after allogeneic hematopoietic stem cell transplant: the ALLOZITHRO randomized clinical trial. JAMA. 2017;318:557–66.</a:t>
+            </a:r>
+            <a:endParaRPr lang="en-US" sz="1100" dirty="0"/>
+          </a:p>
+          <a:p>
+            <a:pPr indent="0" marL="0">
+              <a:spcAft>
+                <a:spcPts val="700"/>
+              </a:spcAft>
+              <a:buNone/>
+            </a:pPr>
+            <a:r>
+              <a:rPr lang="en-US" sz="1100" dirty="0">
+                <a:solidFill>
+                  <a:schemeClr val="tx1"/>
+                </a:solidFill>
+              </a:rPr>
+              <a:t>14. Cheng GS, Bondeelle L, Gooley T, et al. Azithromycin use and increased cancer risk among patients with bronchiolitis obliterans after hematopoietic cell transplantation. Biol Blood Marrow Transplant. 2020;26:392–400.</a:t>
             </a:r>
             <a:endParaRPr lang="en-US" sz="1100" dirty="0"/>
           </a:p>
@@ -16014,7 +16053,7 @@
                   <a:schemeClr val="tx1"/>
                 </a:solidFill>
               </a:rPr>
-              <a:t>10. Jagasia MH, Greinix HT, Arora M, et al. National Institutes of Health consensus development project on criteria for clinical trials in chronic graft-versus-host disease: I. The 2014 diagnosis and staging working group report. Biol Blood Marrow Transplant. 2015;21:389–401.</a:t>
+              <a:t>15. Greer M, Berastegui C, Jaksch P, et al. Lung transplantation after allogeneic stem cell transplantation: a pan-European experience. Eur Respir J. 2018;51:1701330.</a:t>
             </a:r>
             <a:endParaRPr lang="en-US" sz="1100" dirty="0"/>
           </a:p>
@@ -16031,7 +16070,7 @@
                   <a:schemeClr val="tx1"/>
                 </a:solidFill>
               </a:rPr>
-              <a:t>11. Bergeron A, Chevret S, Chagnon K, et al. Budesonide/formoterol for bronchiolitis obliterans after hematopoietic stem cell transplantation. Am J Respir Crit Care Med. 2015;191:1242–9.</a:t>
+              <a:t>16. Archer G, Berger I, Bondeelle L, et al. Interstitial lung diseases after hematopoietic stem cell transplantation: new pattern of lung chronic graft-versus-host disease? Bone Marrow Transplant. 2023;58:87–93.</a:t>
             </a:r>
             <a:endParaRPr lang="en-US" sz="1100" dirty="0"/>
           </a:p>
@@ -16048,7 +16087,24 @@
                   <a:schemeClr val="tx1"/>
                 </a:solidFill>
               </a:rPr>
-              <a:t>12. Williams KM, Cheng GS, Pusic I, et al. Fluticasone, Azithromycin, and Montelukast treatment for new-onset bronchiolitis obliterans syndrome after hematopoietic cell transplantation. Biol Blood Marrow Transplant. 2016;22:710–6.</a:t>
+              <a:t>17. Seo S, Yu J, Jenkins IC, et al. Diagnostic and prognostic plasma biomarkers for idiopathic pneumonia syndrome after hematopoietic cell transplantation. Biol Blood Marrow Transplant. 2017;24:678–86.</a:t>
+            </a:r>
+            <a:endParaRPr lang="en-US" sz="1100" dirty="0"/>
+          </a:p>
+          <a:p>
+            <a:pPr indent="0" marL="0">
+              <a:spcAft>
+                <a:spcPts val="700"/>
+              </a:spcAft>
+              <a:buNone/>
+            </a:pPr>
+            <a:r>
+              <a:rPr lang="en-US" sz="1100" dirty="0">
+                <a:solidFill>
+                  <a:schemeClr val="tx1"/>
+                </a:solidFill>
+              </a:rPr>
+              <a:t>18. Rowan CM, Smith L, Sharron MP, et al. A biomarker panel for risk of early respiratory failure following hematopoietic cell transplantation. Blood Adv. 2022;6:1866–78.</a:t>
             </a:r>
             <a:endParaRPr lang="en-US" sz="1100" dirty="0"/>
           </a:p>
@@ -16186,7 +16242,7 @@
                   <a:schemeClr val="tx1"/>
                 </a:solidFill>
               </a:rPr>
-              <a:t>REFERENCES</a:t>
+              <a:t>BACKUP · BOS · LUNG IN CHRONIC GVHD</a:t>
             </a:r>
             <a:endParaRPr lang="en-US" sz="1100" dirty="0"/>
           </a:p>
@@ -16224,7 +16280,7 @@
                   <a:schemeClr val="tx1"/>
                 </a:solidFill>
               </a:rPr>
-              <a:t>References, part 3 of 3</a:t>
+              <a:t>Lung involvement raises the overall severity of chronic GVHD</a:t>
             </a:r>
             <a:endParaRPr lang="en-US" sz="3600" dirty="0"/>
           </a:p>
@@ -16232,153 +16288,7 @@
       </p:sp>
       <p:sp>
         <p:nvSpPr>
-          <p:cNvPr id="5" name="Text 85"/>
-          <p:cNvSpPr txBox="1"/>
-          <p:nvPr/>
-        </p:nvSpPr>
-        <p:spPr>
-          <a:xfrm>
-            <a:off x="685800" y="2103120"/>
-            <a:ext cx="5120640" cy="3886200"/>
-          </a:xfrm>
-          <a:prstGeom prst="rect">
-            <a:avLst/>
-          </a:prstGeom>
-          <a:noFill/>
-          <a:ln/>
-        </p:spPr>
-        <p:txBody>
-          <a:bodyPr wrap="square" lIns="0" tIns="0" rIns="0" bIns="0" rtlCol="0" anchor="t"/>
-          <a:lstStyle/>
-          <a:p>
-            <a:pPr indent="0" marL="0">
-              <a:spcAft>
-                <a:spcPts val="700"/>
-              </a:spcAft>
-              <a:buNone/>
-            </a:pPr>
-            <a:r>
-              <a:rPr lang="en-US" sz="1100" dirty="0">
-                <a:solidFill>
-                  <a:schemeClr val="tx1"/>
-                </a:solidFill>
-              </a:rPr>
-              <a:t>13. Bergeron A, Chevret S, Granata A, et al. Effect of azithromycin on airflow decline-free survival after allogeneic hematopoietic stem cell transplant: the ALLOZITHRO randomized clinical trial. JAMA. 2017;318:557–66.</a:t>
-            </a:r>
-            <a:endParaRPr lang="en-US" sz="1100" dirty="0"/>
-          </a:p>
-          <a:p>
-            <a:pPr indent="0" marL="0">
-              <a:spcAft>
-                <a:spcPts val="700"/>
-              </a:spcAft>
-              <a:buNone/>
-            </a:pPr>
-            <a:r>
-              <a:rPr lang="en-US" sz="1100" dirty="0">
-                <a:solidFill>
-                  <a:schemeClr val="tx1"/>
-                </a:solidFill>
-              </a:rPr>
-              <a:t>14. Cheng GS, Bondeelle L, Gooley T, et al. Azithromycin use and increased cancer risk among patients with bronchiolitis obliterans after hematopoietic cell transplantation. Biol Blood Marrow Transplant. 2020;26:392–400.</a:t>
-            </a:r>
-            <a:endParaRPr lang="en-US" sz="1100" dirty="0"/>
-          </a:p>
-          <a:p>
-            <a:pPr indent="0" marL="0">
-              <a:spcAft>
-                <a:spcPts val="700"/>
-              </a:spcAft>
-              <a:buNone/>
-            </a:pPr>
-            <a:r>
-              <a:rPr lang="en-US" sz="1100" dirty="0">
-                <a:solidFill>
-                  <a:schemeClr val="tx1"/>
-                </a:solidFill>
-              </a:rPr>
-              <a:t>15. Greer M, Berastegui C, Jaksch P, et al. Lung transplantation after allogeneic stem cell transplantation: a pan-European experience. Eur Respir J. 2018;51:1701330.</a:t>
-            </a:r>
-            <a:endParaRPr lang="en-US" sz="1100" dirty="0"/>
-          </a:p>
-        </p:txBody>
-      </p:sp>
-      <p:sp>
-        <p:nvSpPr>
-          <p:cNvPr id="6" name="Text 86"/>
-          <p:cNvSpPr txBox="1"/>
-          <p:nvPr/>
-        </p:nvSpPr>
-        <p:spPr>
-          <a:xfrm>
-            <a:off x="6400800" y="2103120"/>
-            <a:ext cx="5120640" cy="3886200"/>
-          </a:xfrm>
-          <a:prstGeom prst="rect">
-            <a:avLst/>
-          </a:prstGeom>
-          <a:noFill/>
-          <a:ln/>
-        </p:spPr>
-        <p:txBody>
-          <a:bodyPr wrap="square" lIns="0" tIns="0" rIns="0" bIns="0" rtlCol="0" anchor="t"/>
-          <a:lstStyle/>
-          <a:p>
-            <a:pPr indent="0" marL="0">
-              <a:spcAft>
-                <a:spcPts val="700"/>
-              </a:spcAft>
-              <a:buNone/>
-            </a:pPr>
-            <a:r>
-              <a:rPr lang="en-US" sz="1100" dirty="0">
-                <a:solidFill>
-                  <a:schemeClr val="tx1"/>
-                </a:solidFill>
-              </a:rPr>
-              <a:t>16. Archer G, Berger I, Bondeelle L, et al. Interstitial lung diseases after hematopoietic stem cell transplantation: new pattern of lung chronic graft-versus-host disease? Bone Marrow Transplant. 2023;58:87–93.</a:t>
-            </a:r>
-            <a:endParaRPr lang="en-US" sz="1100" dirty="0"/>
-          </a:p>
-          <a:p>
-            <a:pPr indent="0" marL="0">
-              <a:spcAft>
-                <a:spcPts val="700"/>
-              </a:spcAft>
-              <a:buNone/>
-            </a:pPr>
-            <a:r>
-              <a:rPr lang="en-US" sz="1100" dirty="0">
-                <a:solidFill>
-                  <a:schemeClr val="tx1"/>
-                </a:solidFill>
-              </a:rPr>
-              <a:t>17. Seo S, Yu J, Jenkins IC, et al. Diagnostic and prognostic plasma biomarkers for idiopathic pneumonia syndrome after hematopoietic cell transplantation. Biol Blood Marrow Transplant. 2017;24:678–86.</a:t>
-            </a:r>
-            <a:endParaRPr lang="en-US" sz="1100" dirty="0"/>
-          </a:p>
-          <a:p>
-            <a:pPr indent="0" marL="0">
-              <a:spcAft>
-                <a:spcPts val="700"/>
-              </a:spcAft>
-              <a:buNone/>
-            </a:pPr>
-            <a:r>
-              <a:rPr lang="en-US" sz="1100" dirty="0">
-                <a:solidFill>
-                  <a:schemeClr val="tx1"/>
-                </a:solidFill>
-              </a:rPr>
-              <a:t>18. Rowan CM, Smith L, Sharron MP, et al. A biomarker panel for risk of early respiratory failure following hematopoietic cell transplantation. Blood Adv. 2022;6:1866–78.</a:t>
-            </a:r>
-            <a:endParaRPr lang="en-US" sz="1100" dirty="0"/>
-          </a:p>
-        </p:txBody>
-      </p:sp>
-      <p:sp>
-        <p:nvSpPr>
-          <p:cNvPr id="7" name="Text 0"/>
+          <p:cNvPr id="4" name="Text 0"/>
           <p:cNvSpPr/>
           <p:nvPr>
             <p:ph idx="102" type="body" hasCustomPrompt="1"/>
@@ -16402,182 +16312,6 @@
             <a:pPr algn="l" indent="0" marL="0">
               <a:buNone/>
             </a:pPr>
-            <a:endParaRPr lang="en-US" sz="1000" dirty="0"/>
-          </a:p>
-        </p:txBody>
-      </p:sp>
-      <p:sp>
-        <p:nvSpPr>
-          <p:cNvPr id="25" name="Slide Number Placeholder 0"/>
-          <p:cNvSpPr>
-            <a:spLocks noGrp="1"/>
-          </p:cNvSpPr>
-          <p:nvPr>
-            <p:ph type="sldNum" sz="quarter" idx="4294967295"/>
-          </p:nvPr>
-        </p:nvSpPr>
-        <p:spPr>
-          <a:xfrm>
-            <a:off x="10972800" y="6080760"/>
-            <a:ext cx="530352" cy="274320"/>
-          </a:xfrm>
-          <a:prstGeom prst="rect">
-            <a:avLst/>
-          </a:prstGeom>
-          <a:extLst>
-            <a:ext uri="{C572A759-6A51-4108-AA02-DFA0A04FC94B}">
-              <ma14:wrappingTextBoxFlag xmlns:ma14="http://schemas.microsoft.com/office/mac/drawingml/2011/main" val="0"/>
-            </a:ext>
-          </a:extLst>
-        </p:spPr>
-        <p:txBody>
-          <a:bodyPr/>
-          <a:lstStyle>
-            <a:lvl1pPr>
-              <a:defRPr sz="1000">
-                <a:solidFill>
-                  <a:schemeClr val="tx1"/>
-                </a:solidFill>
-              </a:defRPr>
-            </a:lvl1pPr>
-          </a:lstStyle>
-          <a:p>
-            <a:pPr algn="r"/>
-            <a:fld id="{F7021451-1387-4CA6-816F-3879F97B5CBC}" type="slidenum">
-              <a:rPr b="0" lang="en-US"/>
-              <a:t>25</a:t>
-            </a:fld>
-            <a:endParaRPr lang="en-US"/>
-          </a:p>
-        </p:txBody>
-      </p:sp>
-    </p:spTree>
-  </p:cSld>
-  <p:clrMapOvr>
-    <a:masterClrMapping/>
-  </p:clrMapOvr>
-</p:sld>
-</file>
-
-<file path=ppt/slides/slide26.xml><?xml version="1.0" encoding="utf-8"?>
-<p:sld xmlns:a="http://schemas.openxmlformats.org/drawingml/2006/main" xmlns:r="http://schemas.openxmlformats.org/officeDocument/2006/relationships" xmlns:p="http://schemas.openxmlformats.org/presentationml/2006/main">
-  <p:cSld name="Slide 26">
-    <p:spTree>
-      <p:nvGrpSpPr>
-        <p:cNvPr id="1" name=""/>
-        <p:cNvGrpSpPr/>
-        <p:nvPr/>
-      </p:nvGrpSpPr>
-      <p:grpSpPr>
-        <a:xfrm>
-          <a:off x="0" y="0"/>
-          <a:ext cx="0" cy="0"/>
-          <a:chOff x="0" y="0"/>
-          <a:chExt cx="0" cy="0"/>
-        </a:xfrm>
-      </p:grpSpPr>
-      <p:sp>
-        <p:nvSpPr>
-          <p:cNvPr id="2" name="Text 0"/>
-          <p:cNvSpPr/>
-          <p:nvPr>
-            <p:ph idx="100" type="body" hasCustomPrompt="1"/>
-          </p:nvPr>
-        </p:nvSpPr>
-        <p:spPr>
-          <a:xfrm>
-            <a:off x="685800" y="502920"/>
-            <a:ext cx="10817352" cy="274320"/>
-          </a:xfrm>
-          <a:prstGeom prst="rect">
-            <a:avLst/>
-          </a:prstGeom>
-          <a:noFill/>
-          <a:ln/>
-        </p:spPr>
-        <p:txBody>
-          <a:bodyPr wrap="square" lIns="0" tIns="0" rIns="0" bIns="0" rtlCol="0" anchor="t"/>
-          <a:lstStyle/>
-          <a:p>
-            <a:pPr algn="l" indent="0" marL="0">
-              <a:buNone/>
-            </a:pPr>
-            <a:r>
-              <a:rPr lang="en-US" sz="1100" spc="300" kern="0" dirty="0">
-                <a:solidFill>
-                  <a:schemeClr val="tx1"/>
-                </a:solidFill>
-              </a:rPr>
-              <a:t>BACKUP · BACKUP · LUNG IN CHRONIC GVHD</a:t>
-            </a:r>
-            <a:endParaRPr lang="en-US" sz="1100" dirty="0"/>
-          </a:p>
-        </p:txBody>
-      </p:sp>
-      <p:sp>
-        <p:nvSpPr>
-          <p:cNvPr id="3" name="Text 0"/>
-          <p:cNvSpPr/>
-          <p:nvPr>
-            <p:ph idx="101" type="title" hasCustomPrompt="1"/>
-          </p:nvPr>
-        </p:nvSpPr>
-        <p:spPr>
-          <a:xfrm>
-            <a:off x="685800" y="822960"/>
-            <a:ext cx="10817352" cy="1143000"/>
-          </a:xfrm>
-          <a:prstGeom prst="rect">
-            <a:avLst/>
-          </a:prstGeom>
-          <a:noFill/>
-          <a:ln/>
-        </p:spPr>
-        <p:txBody>
-          <a:bodyPr wrap="square" lIns="0" tIns="0" rIns="0" bIns="0" rtlCol="0" anchor="t"/>
-          <a:lstStyle/>
-          <a:p>
-            <a:pPr algn="l" indent="0" marL="0">
-              <a:buNone/>
-            </a:pPr>
-            <a:r>
-              <a:rPr lang="en-US" sz="3600" b="1" dirty="0">
-                <a:solidFill>
-                  <a:schemeClr val="tx1"/>
-                </a:solidFill>
-              </a:rPr>
-              <a:t>Lung involvement raises the overall severity of chronic GVHD</a:t>
-            </a:r>
-            <a:endParaRPr lang="en-US" sz="3600" dirty="0"/>
-          </a:p>
-        </p:txBody>
-      </p:sp>
-      <p:sp>
-        <p:nvSpPr>
-          <p:cNvPr id="4" name="Text 0"/>
-          <p:cNvSpPr/>
-          <p:nvPr>
-            <p:ph idx="102" type="body" hasCustomPrompt="1"/>
-          </p:nvPr>
-        </p:nvSpPr>
-        <p:spPr>
-          <a:xfrm>
-            <a:off x="685800" y="6080760"/>
-            <a:ext cx="9966960" cy="457200"/>
-          </a:xfrm>
-          <a:prstGeom prst="rect">
-            <a:avLst/>
-          </a:prstGeom>
-          <a:noFill/>
-          <a:ln/>
-        </p:spPr>
-        <p:txBody>
-          <a:bodyPr wrap="square" lIns="0" tIns="0" rIns="0" bIns="0" rtlCol="0" anchor="t"/>
-          <a:lstStyle/>
-          <a:p>
-            <a:pPr algn="l" indent="0" marL="0">
-              <a:buNone/>
-            </a:pPr>
             <a:r>
               <a:rPr lang="en-US" sz="1000" dirty="0">
                 <a:solidFill>
@@ -16592,7 +16326,7 @@
       </p:sp>
       <p:graphicFrame>
         <p:nvGraphicFramePr>
-          <p:cNvPr id="27" name="Table 87"/>
+          <p:cNvPr id="26" name="Table 85"/>
           <p:cNvGraphicFramePr>
             <a:graphicFrameLocks noGrp="1"/>
           </p:cNvGraphicFramePr>
@@ -17409,7 +17143,7 @@
             <a:pPr algn="r"/>
             <a:fld id="{F7021451-1387-4CA6-816F-3879F97B5CBC}" type="slidenum">
               <a:rPr b="0" lang="en-US"/>
-              <a:t>26</a:t>
+              <a:t>25</a:t>
             </a:fld>
             <a:endParaRPr lang="en-US"/>
           </a:p>
@@ -17423,9 +17157,9 @@
 </p:sld>
 </file>
 
-<file path=ppt/slides/slide27.xml><?xml version="1.0" encoding="utf-8"?>
+<file path=ppt/slides/slide26.xml><?xml version="1.0" encoding="utf-8"?>
 <p:sld xmlns:a="http://schemas.openxmlformats.org/drawingml/2006/main" xmlns:r="http://schemas.openxmlformats.org/officeDocument/2006/relationships" xmlns:p="http://schemas.openxmlformats.org/presentationml/2006/main">
-  <p:cSld name="Slide 27">
+  <p:cSld name="Slide 26">
     <p:spTree>
       <p:nvGrpSpPr>
         <p:cNvPr id="1" name=""/>
@@ -17472,7 +17206,7 @@
                   <a:schemeClr val="tx1"/>
                 </a:solidFill>
               </a:rPr>
-              <a:t>BACKUP · BACKUP · IPS BIOMARKERS</a:t>
+              <a:t>BACKUP · IPS · BIOMARKERS</a:t>
             </a:r>
             <a:endParaRPr lang="en-US" sz="1100" dirty="0"/>
           </a:p>
@@ -17556,7 +17290,7 @@
       </p:sp>
       <p:graphicFrame>
         <p:nvGraphicFramePr>
-          <p:cNvPr id="28" name="Table 88"/>
+          <p:cNvPr id="27" name="Table 86"/>
           <p:cNvGraphicFramePr>
             <a:graphicFrameLocks noGrp="1"/>
           </p:cNvGraphicFramePr>
@@ -18127,7 +17861,7 @@
             <a:pPr algn="r"/>
             <a:fld id="{F7021451-1387-4CA6-816F-3879F97B5CBC}" type="slidenum">
               <a:rPr b="0" lang="en-US"/>
-              <a:t>27</a:t>
+              <a:t>26</a:t>
             </a:fld>
             <a:endParaRPr lang="en-US"/>
           </a:p>
@@ -18141,9 +17875,9 @@
 </p:sld>
 </file>
 
-<file path=ppt/slides/slide28.xml><?xml version="1.0" encoding="utf-8"?>
+<file path=ppt/slides/slide27.xml><?xml version="1.0" encoding="utf-8"?>
 <p:sld xmlns:a="http://schemas.openxmlformats.org/drawingml/2006/main" xmlns:r="http://schemas.openxmlformats.org/officeDocument/2006/relationships" xmlns:p="http://schemas.openxmlformats.org/presentationml/2006/main">
-  <p:cSld name="Slide 28">
+  <p:cSld name="Slide 27">
     <p:spTree>
       <p:nvGrpSpPr>
         <p:cNvPr id="1" name=""/>
@@ -18190,7 +17924,7 @@
                   <a:schemeClr val="tx1"/>
                 </a:solidFill>
               </a:rPr>
-              <a:t>BACKUP · BACKUP · LIMITS OF BOS CRITERIA</a:t>
+              <a:t>BACKUP · BOS · LIMITS OF THE CRITERIA</a:t>
             </a:r>
             <a:endParaRPr lang="en-US" sz="1100" dirty="0"/>
           </a:p>
@@ -18274,7 +18008,7 @@
       </p:sp>
       <p:sp>
         <p:nvSpPr>
-          <p:cNvPr id="6" name="Text 89"/>
+          <p:cNvPr id="6" name="Text 87"/>
           <p:cNvSpPr txBox="1"/>
           <p:nvPr/>
         </p:nvSpPr>
@@ -18441,7 +18175,7 @@
             <a:pPr algn="r"/>
             <a:fld id="{F7021451-1387-4CA6-816F-3879F97B5CBC}" type="slidenum">
               <a:rPr b="0" lang="en-US"/>
-              <a:t>28</a:t>
+              <a:t>27</a:t>
             </a:fld>
             <a:endParaRPr lang="en-US"/>
           </a:p>

--- a/slides/decks/s15-pulmonary.pptx
+++ b/slides/decks/s15-pulmonary.pptx
@@ -133,19 +133,19 @@
   <p:extLst>
     <p:ext uri="{521415D9-36F7-43E2-AB2F-B90AF26B5E84}">
       <p14:sectionLst xmlns:p14="http://schemas.microsoft.com/office/powerpoint/2010/main">
-        <p14:section name="Opening" id="{3c5c049b-0be3-5453-e47c-109426cb2d88}">
+        <p14:section name="Opening" id="{fe2b289c-a795-cb3e-4173-5084a5607294}">
           <p14:sldIdLst>
             <p14:sldId id="256"/>
             <p14:sldId id="257"/>
           </p14:sldIdLst>
         </p14:section>
-        <p14:section name="Classification and work-up" id="{d8cc70e2-3973-3b10-2b05-9875e17b552f}">
+        <p14:section name="Classification and work-up" id="{ff0fe76b-a28d-f369-fd9d-8474b8475b1d}">
           <p14:sldIdLst>
             <p14:sldId id="258"/>
             <p14:sldId id="259"/>
           </p14:sldIdLst>
         </p14:section>
-        <p14:section name="Early complications" id="{f4a9174d-976c-4200-d422-cbe9cb0031fd}">
+        <p14:section name="Early complications" id="{746ee17d-fce2-5c79-2e46-f80ff1854807}">
           <p14:sldIdLst>
             <p14:sldId id="260"/>
             <p14:sldId id="261"/>
@@ -156,7 +156,7 @@
             <p14:sldId id="266"/>
           </p14:sldIdLst>
         </p14:section>
-        <p14:section name="Late complications" id="{98be0755-709b-5171-4f34-d817e1fe1e0a}">
+        <p14:section name="Late complications" id="{c8b1e619-6db9-8885-82e0-805fef99ebdd}">
           <p14:sldIdLst>
             <p14:sldId id="267"/>
             <p14:sldId id="268"/>
@@ -165,7 +165,7 @@
             <p14:sldId id="271"/>
           </p14:sldIdLst>
         </p14:section>
-        <p14:section name="Board questions" id="{04add629-6796-cd06-7294-5d898557a390}">
+        <p14:section name="Board questions" id="{3b9e8c63-1740-7b2f-2dc7-69d3aee2a35d}">
           <p14:sldIdLst>
             <p14:sldId id="272"/>
             <p14:sldId id="273"/>
@@ -175,13 +175,13 @@
             <p14:sldId id="277"/>
           </p14:sldIdLst>
         </p14:section>
-        <p14:section name="References" id="{8ef991c9-1fbb-9a6c-b4da-838ffd2ccc2c}">
+        <p14:section name="References" id="{261a4c81-43d1-a51c-ce2e-de66cdface35}">
           <p14:sldIdLst>
             <p14:sldId id="278"/>
             <p14:sldId id="279"/>
           </p14:sldIdLst>
         </p14:section>
-        <p14:section name="Backup" id="{11872858-05ef-3962-fb89-ec6288783fd3}">
+        <p14:section name="Backup" id="{b804ef64-d265-758a-feba-3ad1b18119b0}">
           <p14:sldIdLst>
             <p14:sldId id="280"/>
             <p14:sldId id="281"/>
@@ -1185,7 +1185,7 @@
             </a:pPr>
             <a:r>
               <a:rPr lang="en-US" dirty="0"/>
-              <a:t>NIH 共識的 BOS 診斷，是其他部位有 cGVHD，再加上新出現、對支氣管擴張劑沒反應、合併 air trapping 的阻塞型缺損。三個 PFT 數字要記牢，FEV1/VC 小於 0.7 或低於第五百分位，FEV1 小於預測值 75% 且比基準下降 10% 以上，RV 大於預測值 120%。</a:t>
+              <a:t>NIH 共識的 BOS 診斷，是其他部位有 cGVHD，再加上新出現、對支氣管擴張劑沒反應、合併 air trapping 的阻塞型缺損。三個 PFT 門檻是FEV1/VC 小於 0.7 或低於第五百分位，FEV1 小於預測值 75% 且比基準下降 10% 以上，RV 大於預測值 120%。</a:t>
             </a:r>
           </a:p>
           <a:p>
@@ -2350,7 +2350,7 @@
             </a:pPr>
             <a:r>
               <a:rPr lang="en-US" dirty="0"/>
-              <a:t>答案是 D。BAL 越洗越紅，就是 DAH，加上 TBI、高劑量 CY 和 engraftment 前這個時間點，都很典型。Auto 移植後的 DAH 預後比 allo 好。</a:t>
+              <a:t>正確的是 D。BAL 越洗越紅，就是 DAH，加上 TBI、高劑量 CY 和 engraftment 前這個時間點，都很典型。Auto 移植後的 DAH 預後比 allo 好。</a:t>
             </a:r>
           </a:p>
           <a:p>
@@ -2372,7 +2372,7 @@
             </a:pPr>
             <a:r>
               <a:rPr lang="en-US" dirty="0"/>
-              <a:t>這題的病人在 engraftment 前、接受過 TBI 和 Cy，都是 DAH 的典型背景。臨床上記住兩件事，診斷看 BAL 是否越洗越紅，預後要看是否演變成多重器官衰竭。</a:t>
+              <a:t>這題的病人在 engraftment 前、接受過 TBI 和 Cy，都是 DAH 的典型背景。臨床上有兩件事，診斷看 BAL 是否越洗越紅，預後要看是否演變成多重器官衰竭。</a:t>
             </a:r>
           </a:p>
         </p:txBody>
@@ -2611,7 +2611,7 @@
             </a:pPr>
             <a:r>
               <a:rPr lang="en-US" dirty="0"/>
-              <a:t>答案是 C。FEV1/VC 小於 0.7、FEV1 小於 75% 且下降超過 10%、RV 大於 120%，加上其他部位有 cGVHD，符合 NIH 的 BOS。唯一有 double-blind RCT 證明能改善 FEV1 的就是吸入型 budesonide/formoterol。</a:t>
+              <a:t>選 C。FEV1/VC 小於 0.7、FEV1 小於 75% 且下降超過 10%、RV 大於 120%，加上其他部位有 cGVHD，符合 NIH 的 BOS。唯一有 double-blind RCT 證明能改善 FEV1 的就是吸入型 budesonide/formoterol。</a:t>
             </a:r>
           </a:p>
           <a:p>
@@ -3235,7 +3235,7 @@
             </a:pPr>
             <a:r>
               <a:rPr lang="en-US" dirty="0"/>
-              <a:t>最後一列要特別記住，最常見的肺部併發症是 fluid overload 造成的肺水腫，反而不在這個分類裡。</a:t>
+              <a:t>最後一列是例外，最常見的肺部併發症是 fluid overload 造成的肺水腫，反而不在這個分類裡。</a:t>
             </a:r>
           </a:p>
           <a:p>

--- a/slides/decks/s15-pulmonary.pptx
+++ b/slides/decks/s15-pulmonary.pptx
@@ -133,19 +133,19 @@
   <p:extLst>
     <p:ext uri="{521415D9-36F7-43E2-AB2F-B90AF26B5E84}">
       <p14:sectionLst xmlns:p14="http://schemas.microsoft.com/office/powerpoint/2010/main">
-        <p14:section name="Opening" id="{fe2b289c-a795-cb3e-4173-5084a5607294}">
+        <p14:section name="Opening" id="{594023b9-335c-9541-32ed-986f1add556d}">
           <p14:sldIdLst>
             <p14:sldId id="256"/>
             <p14:sldId id="257"/>
           </p14:sldIdLst>
         </p14:section>
-        <p14:section name="Classification and work-up" id="{ff0fe76b-a28d-f369-fd9d-8474b8475b1d}">
+        <p14:section name="Classification and work-up" id="{b6921265-f3b5-854c-c9cd-96826e11cb16}">
           <p14:sldIdLst>
             <p14:sldId id="258"/>
             <p14:sldId id="259"/>
           </p14:sldIdLst>
         </p14:section>
-        <p14:section name="Early complications" id="{746ee17d-fce2-5c79-2e46-f80ff1854807}">
+        <p14:section name="Early complications" id="{dba78aba-4aa2-50a8-499c-66907d611055}">
           <p14:sldIdLst>
             <p14:sldId id="260"/>
             <p14:sldId id="261"/>
@@ -156,7 +156,7 @@
             <p14:sldId id="266"/>
           </p14:sldIdLst>
         </p14:section>
-        <p14:section name="Late complications" id="{c8b1e619-6db9-8885-82e0-805fef99ebdd}">
+        <p14:section name="Late complications" id="{86f168e7-d915-e7da-dd7c-45e3956a3c20}">
           <p14:sldIdLst>
             <p14:sldId id="267"/>
             <p14:sldId id="268"/>
@@ -165,7 +165,7 @@
             <p14:sldId id="271"/>
           </p14:sldIdLst>
         </p14:section>
-        <p14:section name="Board questions" id="{3b9e8c63-1740-7b2f-2dc7-69d3aee2a35d}">
+        <p14:section name="Board questions" id="{596470d6-d529-f8b3-ced1-ad3f77e86eba}">
           <p14:sldIdLst>
             <p14:sldId id="272"/>
             <p14:sldId id="273"/>
@@ -175,13 +175,13 @@
             <p14:sldId id="277"/>
           </p14:sldIdLst>
         </p14:section>
-        <p14:section name="References" id="{261a4c81-43d1-a51c-ce2e-de66cdface35}">
+        <p14:section name="References" id="{2c7c014a-1fb9-d3b1-9db6-06a0c9435e08}">
           <p14:sldIdLst>
             <p14:sldId id="278"/>
             <p14:sldId id="279"/>
           </p14:sldIdLst>
         </p14:section>
-        <p14:section name="Backup" id="{b804ef64-d265-758a-feba-3ad1b18119b0}">
+        <p14:section name="Backup" id="{92004410-158b-bf87-efdb-8bb94d57992f}">
           <p14:sldIdLst>
             <p14:sldId id="280"/>
             <p14:sldId id="281"/>
